--- a/classes/parte-2-criptografia-aplicada/053-intercambio-de-claves-diffie-hellman/clase-053-presentacion.pptx
+++ b/classes/parte-2-criptografia-aplicada/053-intercambio-de-claves-diffie-hellman/clase-053-presentacion.pptx
@@ -17,6 +17,9 @@
     <p:sldId id="265" r:id="rId16"/>
     <p:sldId id="266" r:id="rId17"/>
     <p:sldId id="267" r:id="rId18"/>
+    <p:sldId id="268" r:id="rId19"/>
+    <p:sldId id="269" r:id="rId20"/>
+    <p:sldId id="270" r:id="rId21"/>
   </p:sldIdLst>
   <p:sldSz cx="9144000" cy="6858000" type="screen4x3"/>
   <p:notesSz cx="6858000" cy="9144000"/>
@@ -3198,7 +3201,7 @@
                   <a:srgbClr val="0B3D2E"/>
                 </a:solidFill>
               </a:rPr>
-              <a:t>⚠️ Errores comunes</a:t>
+              <a:t>✍️ Ejercicios</a:t>
             </a:r>
           </a:p>
         </p:txBody>
@@ -3236,67 +3239,82 @@
                   <a:srgbClr val="22282E"/>
                 </a:solidFill>
               </a:rPr>
-              <a:t>•  DH sin autenticación — Vulnerable a MITM; añade firmas o certificados</a:t>
-            </a:r>
-          </a:p>
-          <a:p>
-            <a:pPr>
-              <a:spcAft>
-                <a:spcPts val="600"/>
-              </a:spcAft>
-            </a:pPr>
-            <a:r>
-              <a:rPr sz="1500">
-                <a:solidFill>
-                  <a:srgbClr val="22282E"/>
-                </a:solidFill>
-              </a:rPr>
-              <a:t>•  Usar el secreto DH directamente como clave — Deriva con HKDF; el secreto bruto no es uniforme</a:t>
-            </a:r>
-          </a:p>
-          <a:p>
-            <a:pPr>
-              <a:spcAft>
-                <a:spcPts val="600"/>
-              </a:spcAft>
-            </a:pPr>
-            <a:r>
-              <a:rPr sz="1500">
-                <a:solidFill>
-                  <a:srgbClr val="22282E"/>
-                </a:solidFill>
-              </a:rPr>
-              <a:t>•  Grupos DH pequeños o compartidos débiles — Logjam; usa ≥2048 bits o X25519</a:t>
-            </a:r>
-          </a:p>
-          <a:p>
-            <a:pPr>
-              <a:spcAft>
-                <a:spcPts val="600"/>
-              </a:spcAft>
-            </a:pPr>
-            <a:r>
-              <a:rPr sz="1500">
-                <a:solidFill>
-                  <a:srgbClr val="22282E"/>
-                </a:solidFill>
-              </a:rPr>
-              <a:t>•  DH estático sin forward secrecy — Compromiso futuro descifra el pasado; usa efímeros</a:t>
-            </a:r>
-          </a:p>
-          <a:p>
-            <a:pPr>
-              <a:spcAft>
-                <a:spcPts val="600"/>
-              </a:spcAft>
-            </a:pPr>
-            <a:r>
-              <a:rPr sz="1500">
-                <a:solidFill>
-                  <a:srgbClr val="22282E"/>
-                </a:solidFill>
-              </a:rPr>
-              <a:t>•  Reutilizar el par efímero — Anula forward secrecy; genera uno por sesión</a:t>
+              <a:t>•  Repite el DH de juguete con p=97, g=5 y valores propios.</a:t>
+            </a:r>
+          </a:p>
+          <a:p>
+            <a:pPr>
+              <a:spcAft>
+                <a:spcPts val="600"/>
+              </a:spcAft>
+            </a:pPr>
+            <a:r>
+              <a:rPr sz="1500">
+                <a:solidFill>
+                  <a:srgbClr val="22282E"/>
+                </a:solidFill>
+              </a:rPr>
+              <a:t>•  Explica por qué gˣʸ = gʸˣ permite el acuerdo.</a:t>
+            </a:r>
+          </a:p>
+          <a:p>
+            <a:pPr>
+              <a:spcAft>
+                <a:spcPts val="600"/>
+              </a:spcAft>
+            </a:pPr>
+            <a:r>
+              <a:rPr sz="1500">
+                <a:solidFill>
+                  <a:srgbClr val="22282E"/>
+                </a:solidFill>
+              </a:rPr>
+              <a:t>•  Implementa el MITM y muéstralo funcionando en tu laboratorio.</a:t>
+            </a:r>
+          </a:p>
+          <a:p>
+            <a:pPr>
+              <a:spcAft>
+                <a:spcPts val="600"/>
+              </a:spcAft>
+            </a:pPr>
+            <a:r>
+              <a:rPr sz="1500">
+                <a:solidFill>
+                  <a:srgbClr val="22282E"/>
+                </a:solidFill>
+              </a:rPr>
+              <a:t>•  Investiga el ataque Logjam y qué grupos evitar.</a:t>
+            </a:r>
+          </a:p>
+          <a:p>
+            <a:pPr>
+              <a:spcAft>
+                <a:spcPts val="600"/>
+              </a:spcAft>
+            </a:pPr>
+            <a:r>
+              <a:rPr sz="1500">
+                <a:solidFill>
+                  <a:srgbClr val="22282E"/>
+                </a:solidFill>
+              </a:rPr>
+              <a:t>•  Deriva dos claves (cifrado y MAC) del mismo secreto con HKDF e info distintos.</a:t>
+            </a:r>
+          </a:p>
+          <a:p>
+            <a:pPr>
+              <a:spcAft>
+                <a:spcPts val="600"/>
+              </a:spcAft>
+            </a:pPr>
+            <a:r>
+              <a:rPr sz="1500">
+                <a:solidFill>
+                  <a:srgbClr val="22282E"/>
+                </a:solidFill>
+              </a:rPr>
+              <a:t>•  Compara DHE clásico con ECDHE en rendimiento y tamaño.</a:t>
             </a:r>
           </a:p>
         </p:txBody>
@@ -3347,7 +3365,7 @@
                   <a:srgbClr val="0B3D2E"/>
                 </a:solidFill>
               </a:rPr>
-              <a:t>❓ Preguntas frecuentes</a:t>
+              <a:t>📝 Reto verificable</a:t>
             </a:r>
           </a:p>
         </p:txBody>
@@ -3385,82 +3403,7 @@
                   <a:srgbClr val="22282E"/>
                 </a:solidFill>
               </a:rPr>
-              <a:t>•  ❓ ¿DH cifra datos?</a:t>
-            </a:r>
-          </a:p>
-          <a:p>
-            <a:pPr>
-              <a:spcAft>
-                <a:spcPts val="600"/>
-              </a:spcAft>
-            </a:pPr>
-            <a:r>
-              <a:rPr sz="1500">
-                <a:solidFill>
-                  <a:srgbClr val="22282E"/>
-                </a:solidFill>
-              </a:rPr>
-              <a:t>•  No; solo acuerda una clave. Luego cifras con AES/ChaCha20 usando esa clave derivada.</a:t>
-            </a:r>
-          </a:p>
-          <a:p>
-            <a:pPr>
-              <a:spcAft>
-                <a:spcPts val="600"/>
-              </a:spcAft>
-            </a:pPr>
-            <a:r>
-              <a:rPr sz="1500">
-                <a:solidFill>
-                  <a:srgbClr val="22282E"/>
-                </a:solidFill>
-              </a:rPr>
-              <a:t>•  ❓ ¿Qué es forward secrecy y por qué importa?</a:t>
-            </a:r>
-          </a:p>
-          <a:p>
-            <a:pPr>
-              <a:spcAft>
-                <a:spcPts val="600"/>
-              </a:spcAft>
-            </a:pPr>
-            <a:r>
-              <a:rPr sz="1500">
-                <a:solidFill>
-                  <a:srgbClr val="22282E"/>
-                </a:solidFill>
-              </a:rPr>
-              <a:t>•  Que capturar tráfico hoy y robar la clave del servidor mañana no permite descifrarlo, gracias a los efímeros. TLS 1.3 lo exige.</a:t>
-            </a:r>
-          </a:p>
-          <a:p>
-            <a:pPr>
-              <a:spcAft>
-                <a:spcPts val="600"/>
-              </a:spcAft>
-            </a:pPr>
-            <a:r>
-              <a:rPr sz="1500">
-                <a:solidFill>
-                  <a:srgbClr val="22282E"/>
-                </a:solidFill>
-              </a:rPr>
-              <a:t>•  ❓ ¿DH resiste cuántica?</a:t>
-            </a:r>
-          </a:p>
-          <a:p>
-            <a:pPr>
-              <a:spcAft>
-                <a:spcPts val="600"/>
-              </a:spcAft>
-            </a:pPr>
-            <a:r>
-              <a:rPr sz="1500">
-                <a:solidFill>
-                  <a:srgbClr val="22282E"/>
-                </a:solidFill>
-              </a:rPr>
-              <a:t>•  No; cae ante Shor, igual que RSA/ECC. De ahí la cripto post-cuántica.</a:t>
+              <a:t>•  Implementa un handshake ECDHE autenticado: cada parte firma su clave pública efímera con Ed25519 (clave de largo plazo) y verifica la del otro antes de derivar la clave de sesión. Criterio de…</a:t>
             </a:r>
           </a:p>
         </p:txBody>
@@ -3511,7 +3454,7 @@
                   <a:srgbClr val="0B3D2E"/>
                 </a:solidFill>
               </a:rPr>
-              <a:t>🔗 Referencias</a:t>
+              <a:t>⚠️ Errores comunes</a:t>
             </a:r>
           </a:p>
         </p:txBody>
@@ -3549,6 +3492,319 @@
                   <a:srgbClr val="22282E"/>
                 </a:solidFill>
               </a:rPr>
+              <a:t>•  DH sin autenticación — Vulnerable a MITM; añade firmas o certificados</a:t>
+            </a:r>
+          </a:p>
+          <a:p>
+            <a:pPr>
+              <a:spcAft>
+                <a:spcPts val="600"/>
+              </a:spcAft>
+            </a:pPr>
+            <a:r>
+              <a:rPr sz="1500">
+                <a:solidFill>
+                  <a:srgbClr val="22282E"/>
+                </a:solidFill>
+              </a:rPr>
+              <a:t>•  Usar el secreto DH directamente como clave — Deriva con HKDF; el secreto bruto no es uniforme</a:t>
+            </a:r>
+          </a:p>
+          <a:p>
+            <a:pPr>
+              <a:spcAft>
+                <a:spcPts val="600"/>
+              </a:spcAft>
+            </a:pPr>
+            <a:r>
+              <a:rPr sz="1500">
+                <a:solidFill>
+                  <a:srgbClr val="22282E"/>
+                </a:solidFill>
+              </a:rPr>
+              <a:t>•  Grupos DH pequeños o compartidos débiles — Logjam; usa ≥2048 bits o X25519</a:t>
+            </a:r>
+          </a:p>
+          <a:p>
+            <a:pPr>
+              <a:spcAft>
+                <a:spcPts val="600"/>
+              </a:spcAft>
+            </a:pPr>
+            <a:r>
+              <a:rPr sz="1500">
+                <a:solidFill>
+                  <a:srgbClr val="22282E"/>
+                </a:solidFill>
+              </a:rPr>
+              <a:t>•  DH estático sin forward secrecy — Compromiso futuro descifra el pasado; usa efímeros</a:t>
+            </a:r>
+          </a:p>
+          <a:p>
+            <a:pPr>
+              <a:spcAft>
+                <a:spcPts val="600"/>
+              </a:spcAft>
+            </a:pPr>
+            <a:r>
+              <a:rPr sz="1500">
+                <a:solidFill>
+                  <a:srgbClr val="22282E"/>
+                </a:solidFill>
+              </a:rPr>
+              <a:t>•  Reutilizar el par efímero — Anula forward secrecy; genera uno por sesión</a:t>
+            </a:r>
+          </a:p>
+        </p:txBody>
+      </p:sp>
+    </p:spTree>
+  </p:cSld>
+  <p:clrMapOvr>
+    <a:masterClrMapping/>
+  </p:clrMapOvr>
+</p:sld>
+</file>
+
+<file path=ppt/slides/slide13.xml><?xml version="1.0" encoding="utf-8"?>
+<p:sld xmlns:a="http://schemas.openxmlformats.org/drawingml/2006/main" xmlns:p="http://schemas.openxmlformats.org/presentationml/2006/main" xmlns:r="http://schemas.openxmlformats.org/officeDocument/2006/relationships">
+  <p:cSld>
+    <p:spTree>
+      <p:nvGrpSpPr>
+        <p:cNvPr id="1" name=""/>
+        <p:cNvGrpSpPr/>
+        <p:nvPr/>
+      </p:nvGrpSpPr>
+      <p:grpSpPr/>
+      <p:sp>
+        <p:nvSpPr>
+          <p:cNvPr id="2" name="TextBox 1"/>
+          <p:cNvSpPr txBox="1"/>
+          <p:nvPr/>
+        </p:nvSpPr>
+        <p:spPr>
+          <a:xfrm>
+            <a:off x="457200" y="320040"/>
+            <a:ext cx="8229600" cy="822960"/>
+          </a:xfrm>
+          <a:prstGeom prst="rect">
+            <a:avLst/>
+          </a:prstGeom>
+          <a:noFill/>
+        </p:spPr>
+        <p:txBody>
+          <a:bodyPr wrap="square">
+            <a:spAutoFit/>
+          </a:bodyPr>
+          <a:lstStyle/>
+          <a:p>
+            <a:r>
+              <a:rPr sz="2600" b="1">
+                <a:solidFill>
+                  <a:srgbClr val="0B3D2E"/>
+                </a:solidFill>
+              </a:rPr>
+              <a:t>❓ Preguntas frecuentes</a:t>
+            </a:r>
+          </a:p>
+        </p:txBody>
+      </p:sp>
+      <p:sp>
+        <p:nvSpPr>
+          <p:cNvPr id="3" name="TextBox 2"/>
+          <p:cNvSpPr txBox="1"/>
+          <p:nvPr/>
+        </p:nvSpPr>
+        <p:spPr>
+          <a:xfrm>
+            <a:off x="457200" y="1280160"/>
+            <a:ext cx="8229600" cy="4937760"/>
+          </a:xfrm>
+          <a:prstGeom prst="rect">
+            <a:avLst/>
+          </a:prstGeom>
+          <a:noFill/>
+        </p:spPr>
+        <p:txBody>
+          <a:bodyPr wrap="square">
+            <a:spAutoFit/>
+          </a:bodyPr>
+          <a:lstStyle/>
+          <a:p>
+            <a:pPr>
+              <a:spcAft>
+                <a:spcPts val="600"/>
+              </a:spcAft>
+            </a:pPr>
+            <a:r>
+              <a:rPr sz="1500">
+                <a:solidFill>
+                  <a:srgbClr val="22282E"/>
+                </a:solidFill>
+              </a:rPr>
+              <a:t>•  ❓ ¿DH cifra datos?</a:t>
+            </a:r>
+          </a:p>
+          <a:p>
+            <a:pPr>
+              <a:spcAft>
+                <a:spcPts val="600"/>
+              </a:spcAft>
+            </a:pPr>
+            <a:r>
+              <a:rPr sz="1500">
+                <a:solidFill>
+                  <a:srgbClr val="22282E"/>
+                </a:solidFill>
+              </a:rPr>
+              <a:t>•  No; solo acuerda una clave. Luego cifras con AES/ChaCha20 usando esa clave derivada.</a:t>
+            </a:r>
+          </a:p>
+          <a:p>
+            <a:pPr>
+              <a:spcAft>
+                <a:spcPts val="600"/>
+              </a:spcAft>
+            </a:pPr>
+            <a:r>
+              <a:rPr sz="1500">
+                <a:solidFill>
+                  <a:srgbClr val="22282E"/>
+                </a:solidFill>
+              </a:rPr>
+              <a:t>•  ❓ ¿Qué es forward secrecy y por qué importa?</a:t>
+            </a:r>
+          </a:p>
+          <a:p>
+            <a:pPr>
+              <a:spcAft>
+                <a:spcPts val="600"/>
+              </a:spcAft>
+            </a:pPr>
+            <a:r>
+              <a:rPr sz="1500">
+                <a:solidFill>
+                  <a:srgbClr val="22282E"/>
+                </a:solidFill>
+              </a:rPr>
+              <a:t>•  Que capturar tráfico hoy y robar la clave del servidor mañana no permite descifrarlo, gracias a los efímeros. TLS 1.3 lo exige.</a:t>
+            </a:r>
+          </a:p>
+          <a:p>
+            <a:pPr>
+              <a:spcAft>
+                <a:spcPts val="600"/>
+              </a:spcAft>
+            </a:pPr>
+            <a:r>
+              <a:rPr sz="1500">
+                <a:solidFill>
+                  <a:srgbClr val="22282E"/>
+                </a:solidFill>
+              </a:rPr>
+              <a:t>•  ❓ ¿DH resiste cuántica?</a:t>
+            </a:r>
+          </a:p>
+          <a:p>
+            <a:pPr>
+              <a:spcAft>
+                <a:spcPts val="600"/>
+              </a:spcAft>
+            </a:pPr>
+            <a:r>
+              <a:rPr sz="1500">
+                <a:solidFill>
+                  <a:srgbClr val="22282E"/>
+                </a:solidFill>
+              </a:rPr>
+              <a:t>•  No; cae ante Shor, igual que RSA/ECC. De ahí la cripto post-cuántica.</a:t>
+            </a:r>
+          </a:p>
+        </p:txBody>
+      </p:sp>
+    </p:spTree>
+  </p:cSld>
+  <p:clrMapOvr>
+    <a:masterClrMapping/>
+  </p:clrMapOvr>
+</p:sld>
+</file>
+
+<file path=ppt/slides/slide14.xml><?xml version="1.0" encoding="utf-8"?>
+<p:sld xmlns:a="http://schemas.openxmlformats.org/drawingml/2006/main" xmlns:p="http://schemas.openxmlformats.org/presentationml/2006/main" xmlns:r="http://schemas.openxmlformats.org/officeDocument/2006/relationships">
+  <p:cSld>
+    <p:spTree>
+      <p:nvGrpSpPr>
+        <p:cNvPr id="1" name=""/>
+        <p:cNvGrpSpPr/>
+        <p:nvPr/>
+      </p:nvGrpSpPr>
+      <p:grpSpPr/>
+      <p:sp>
+        <p:nvSpPr>
+          <p:cNvPr id="2" name="TextBox 1"/>
+          <p:cNvSpPr txBox="1"/>
+          <p:nvPr/>
+        </p:nvSpPr>
+        <p:spPr>
+          <a:xfrm>
+            <a:off x="457200" y="320040"/>
+            <a:ext cx="8229600" cy="822960"/>
+          </a:xfrm>
+          <a:prstGeom prst="rect">
+            <a:avLst/>
+          </a:prstGeom>
+          <a:noFill/>
+        </p:spPr>
+        <p:txBody>
+          <a:bodyPr wrap="square">
+            <a:spAutoFit/>
+          </a:bodyPr>
+          <a:lstStyle/>
+          <a:p>
+            <a:r>
+              <a:rPr sz="2600" b="1">
+                <a:solidFill>
+                  <a:srgbClr val="0B3D2E"/>
+                </a:solidFill>
+              </a:rPr>
+              <a:t>🔗 Referencias</a:t>
+            </a:r>
+          </a:p>
+        </p:txBody>
+      </p:sp>
+      <p:sp>
+        <p:nvSpPr>
+          <p:cNvPr id="3" name="TextBox 2"/>
+          <p:cNvSpPr txBox="1"/>
+          <p:nvPr/>
+        </p:nvSpPr>
+        <p:spPr>
+          <a:xfrm>
+            <a:off x="457200" y="1280160"/>
+            <a:ext cx="8229600" cy="4937760"/>
+          </a:xfrm>
+          <a:prstGeom prst="rect">
+            <a:avLst/>
+          </a:prstGeom>
+          <a:noFill/>
+        </p:spPr>
+        <p:txBody>
+          <a:bodyPr wrap="square">
+            <a:spAutoFit/>
+          </a:bodyPr>
+          <a:lstStyle/>
+          <a:p>
+            <a:pPr>
+              <a:spcAft>
+                <a:spcPts val="600"/>
+              </a:spcAft>
+            </a:pPr>
+            <a:r>
+              <a:rPr sz="1500">
+                <a:solidFill>
+                  <a:srgbClr val="22282E"/>
+                </a:solidFill>
+              </a:rPr>
               <a:t>•  Wong, Real-World Cryptography, cap. 5.</a:t>
             </a:r>
           </a:p>
@@ -3599,6 +3855,81 @@
           </a:p>
         </p:txBody>
       </p:sp>
+    </p:spTree>
+  </p:cSld>
+  <p:clrMapOvr>
+    <a:masterClrMapping/>
+  </p:clrMapOvr>
+</p:sld>
+</file>
+
+<file path=ppt/slides/slide15.xml><?xml version="1.0" encoding="utf-8"?>
+<p:sld xmlns:a="http://schemas.openxmlformats.org/drawingml/2006/main" xmlns:p="http://schemas.openxmlformats.org/presentationml/2006/main" xmlns:r="http://schemas.openxmlformats.org/officeDocument/2006/relationships">
+  <p:cSld>
+    <p:spTree>
+      <p:nvGrpSpPr>
+        <p:cNvPr id="1" name=""/>
+        <p:cNvGrpSpPr/>
+        <p:nvPr/>
+      </p:nvGrpSpPr>
+      <p:grpSpPr/>
+      <p:sp>
+        <p:nvSpPr>
+          <p:cNvPr id="2" name="TextBox 1"/>
+          <p:cNvSpPr txBox="1"/>
+          <p:nvPr/>
+        </p:nvSpPr>
+        <p:spPr>
+          <a:xfrm>
+            <a:off x="457200" y="274320"/>
+            <a:ext cx="8229600" cy="640080"/>
+          </a:xfrm>
+          <a:prstGeom prst="rect">
+            <a:avLst/>
+          </a:prstGeom>
+          <a:noFill/>
+        </p:spPr>
+        <p:txBody>
+          <a:bodyPr wrap="square">
+            <a:spAutoFit/>
+          </a:bodyPr>
+          <a:lstStyle/>
+          <a:p>
+            <a:r>
+              <a:rPr sz="2200" b="1">
+                <a:solidFill>
+                  <a:srgbClr val="0B3D2E"/>
+                </a:solidFill>
+              </a:rPr>
+              <a:t>Diagrama de la clase</a:t>
+            </a:r>
+          </a:p>
+        </p:txBody>
+      </p:sp>
+      <p:pic>
+        <p:nvPicPr>
+          <p:cNvPr id="3" name="Picture 2" descr="ef74dc68ad8df42f.png"/>
+          <p:cNvPicPr>
+            <a:picLocks noChangeAspect="1"/>
+          </p:cNvPicPr>
+          <p:nvPr/>
+        </p:nvPicPr>
+        <p:blipFill>
+          <a:blip r:embed="rId2"/>
+          <a:stretch>
+            <a:fillRect/>
+          </a:stretch>
+        </p:blipFill>
+        <p:spPr>
+          <a:xfrm>
+            <a:off x="2177692" y="1097280"/>
+            <a:ext cx="4788615" cy="5303520"/>
+          </a:xfrm>
+          <a:prstGeom prst="rect">
+            <a:avLst/>
+          </a:prstGeom>
+        </p:spPr>
+      </p:pic>
     </p:spTree>
   </p:cSld>
   <p:clrMapOvr>
@@ -3683,7 +4014,7 @@
                   <a:srgbClr val="22282E"/>
                 </a:solidFill>
               </a:rPr>
-              <a:t>•  Comprender cómo dos partes que nunca se han visto pueden acordar una clave secreta compartida sobre un canal público, mediante Diffie-Hellman (DH) y su variante de curva elíptica (ECDH). El alumno entenderá el problema del logaritmo discreto, la diferencia entre DH estático y efímero, el concepto de forward secrecy y por qué DH sin autenticación es vulnerable a un ataque de intermediario (MITM).</a:t>
+              <a:t>•  Comprender cómo dos partes que nunca se han visto pueden acordar una clave secreta compartida sobre un canal público, mediante Diffie-Hellman (DH) y su variante de curva elíptica (ECDH). El alumno…</a:t>
             </a:r>
           </a:p>
         </p:txBody>
@@ -4077,7 +4408,7 @@
                   <a:srgbClr val="0B3D2E"/>
                 </a:solidFill>
               </a:rPr>
-              <a:t>📖 Definiciones y características</a:t>
+              <a:t>🧠 Explicación en profundidad</a:t>
             </a:r>
           </a:p>
         </p:txBody>
@@ -4115,97 +4446,97 @@
                   <a:srgbClr val="22282E"/>
                 </a:solidFill>
               </a:rPr>
-              <a:t>•  Diffie-Hellman: protocolo donde cada parte elige un secreto, publica gˣ mod p y ambos calculan gˣʸ. Característica: acuerdan clave sin transmitirla.</a:t>
-            </a:r>
-          </a:p>
-          <a:p>
-            <a:pPr>
-              <a:spcAft>
-                <a:spcPts val="600"/>
-              </a:spcAft>
-            </a:pPr>
-            <a:r>
-              <a:rPr sz="1500">
-                <a:solidFill>
-                  <a:srgbClr val="22282E"/>
-                </a:solidFill>
-              </a:rPr>
-              <a:t>•  Problema del logaritmo discreto: dado g, p y gˣ mod p, hallar x es inviable con parámetros grandes.</a:t>
-            </a:r>
-          </a:p>
-          <a:p>
-            <a:pPr>
-              <a:spcAft>
-                <a:spcPts val="600"/>
-              </a:spcAft>
-            </a:pPr>
-            <a:r>
-              <a:rPr sz="1500">
-                <a:solidFill>
-                  <a:srgbClr val="22282E"/>
-                </a:solidFill>
-              </a:rPr>
-              <a:t>•  DHE / ECDHE (efímero): se genera un par nuevo por sesión; aporta forward secrecy.</a:t>
-            </a:r>
-          </a:p>
-          <a:p>
-            <a:pPr>
-              <a:spcAft>
-                <a:spcPts val="600"/>
-              </a:spcAft>
-            </a:pPr>
-            <a:r>
-              <a:rPr sz="1500">
-                <a:solidFill>
-                  <a:srgbClr val="22282E"/>
-                </a:solidFill>
-              </a:rPr>
-              <a:t>•  Forward secrecy: comprometer la clave de largo plazo no descifra sesiones pasadas, porque los efímeros ya se descartaron.</a:t>
-            </a:r>
-          </a:p>
-          <a:p>
-            <a:pPr>
-              <a:spcAft>
-                <a:spcPts val="600"/>
-              </a:spcAft>
-            </a:pPr>
-            <a:r>
-              <a:rPr sz="1500">
-                <a:solidFill>
-                  <a:srgbClr val="22282E"/>
-                </a:solidFill>
-              </a:rPr>
-              <a:t>•  HKDF: función de derivación (extract-then-expand) que convierte el secreto compartido en claves de longitud y propósito adecuados.</a:t>
-            </a:r>
-          </a:p>
-          <a:p>
-            <a:pPr>
-              <a:spcAft>
-                <a:spcPts val="600"/>
-              </a:spcAft>
-            </a:pPr>
-            <a:r>
-              <a:rPr sz="1500">
-                <a:solidFill>
-                  <a:srgbClr val="22282E"/>
-                </a:solidFill>
-              </a:rPr>
-              <a:t>•  MITM: sin autenticación, un atacante intercepta y sustituye las claves públicas, estableciendo dos canales que él controla.</a:t>
-            </a:r>
-          </a:p>
-          <a:p>
-            <a:pPr>
-              <a:spcAft>
-                <a:spcPts val="600"/>
-              </a:spcAft>
-            </a:pPr>
-            <a:r>
-              <a:rPr sz="1500">
-                <a:solidFill>
-                  <a:srgbClr val="22282E"/>
-                </a:solidFill>
-              </a:rPr>
-              <a:t>•  Grupos MODP / Curve25519: parámetros recomendados; evitar primos pequeños o de origen dudoso (Logjam).</a:t>
+              <a:t>•  Diffie-Hellman (1976) es probablemente la idea más elegante de la criptografía: dos</a:t>
+            </a:r>
+          </a:p>
+          <a:p>
+            <a:pPr>
+              <a:spcAft>
+                <a:spcPts val="600"/>
+              </a:spcAft>
+            </a:pPr>
+            <a:r>
+              <a:rPr sz="1500">
+                <a:solidFill>
+                  <a:srgbClr val="22282E"/>
+                </a:solidFill>
+              </a:rPr>
+              <a:t>•  partes que nunca se han visto pueden acordar una clave secreta intercambiando solo</a:t>
+            </a:r>
+          </a:p>
+          <a:p>
+            <a:pPr>
+              <a:spcAft>
+                <a:spcPts val="600"/>
+              </a:spcAft>
+            </a:pPr>
+            <a:r>
+              <a:rPr sz="1500">
+                <a:solidFill>
+                  <a:srgbClr val="22282E"/>
+                </a:solidFill>
+              </a:rPr>
+              <a:t>•  mensajes públicos, de modo que quien escuche toda la conversación no puede deducirla.</a:t>
+            </a:r>
+          </a:p>
+          <a:p>
+            <a:pPr>
+              <a:spcAft>
+                <a:spcPts val="600"/>
+              </a:spcAft>
+            </a:pPr>
+            <a:r>
+              <a:rPr sz="1500">
+                <a:solidFill>
+                  <a:srgbClr val="22282E"/>
+                </a:solidFill>
+              </a:rPr>
+              <a:t>•  El mecanismo se apoya en la conmutatividad de la exponenciación modular: se acuerdan</a:t>
+            </a:r>
+          </a:p>
+          <a:p>
+            <a:pPr>
+              <a:spcAft>
+                <a:spcPts val="600"/>
+              </a:spcAft>
+            </a:pPr>
+            <a:r>
+              <a:rPr sz="1500">
+                <a:solidFill>
+                  <a:srgbClr val="22282E"/>
+                </a:solidFill>
+              </a:rPr>
+              <a:t>•  públicamente un primo grande p y un generador g; Alice elige un secreto a y envía</a:t>
+            </a:r>
+          </a:p>
+          <a:p>
+            <a:pPr>
+              <a:spcAft>
+                <a:spcPts val="600"/>
+              </a:spcAft>
+            </a:pPr>
+            <a:r>
+              <a:rPr sz="1500">
+                <a:solidFill>
+                  <a:srgbClr val="22282E"/>
+                </a:solidFill>
+              </a:rPr>
+              <a:t>•  A = gᵃ mod p; Bob elige b y envía B = gᵇ mod p; cada uno eleva lo recibido a su</a:t>
+            </a:r>
+          </a:p>
+          <a:p>
+            <a:pPr>
+              <a:spcAft>
+                <a:spcPts val="600"/>
+              </a:spcAft>
+            </a:pPr>
+            <a:r>
+              <a:rPr sz="1500">
+                <a:solidFill>
+                  <a:srgbClr val="22282E"/>
+                </a:solidFill>
+              </a:rPr>
+              <a:t>•  propio secreto y ambos obtienen gᵃᵇ mod p. El espía ve p, g, A y B, y para</a:t>
             </a:r>
           </a:p>
         </p:txBody>
@@ -4256,7 +4587,7 @@
                   <a:srgbClr val="0B3D2E"/>
                 </a:solidFill>
               </a:rPr>
-              <a:t>🧰 Herramientas y preparación</a:t>
+              <a:t>📖 Definiciones y características</a:t>
             </a:r>
           </a:p>
         </p:txBody>
@@ -4294,37 +4625,97 @@
                   <a:srgbClr val="22282E"/>
                 </a:solidFill>
               </a:rPr>
-              <a:t>•  openssl version</a:t>
-            </a:r>
-          </a:p>
-          <a:p>
-            <a:pPr>
-              <a:spcAft>
-                <a:spcPts val="600"/>
-              </a:spcAft>
-            </a:pPr>
-            <a:r>
-              <a:rPr sz="1500">
-                <a:solidFill>
-                  <a:srgbClr val="22282E"/>
-                </a:solidFill>
-              </a:rPr>
-              <a:t>•  pip install cryptography</a:t>
-            </a:r>
-          </a:p>
-          <a:p>
-            <a:pPr>
-              <a:spcAft>
-                <a:spcPts val="600"/>
-              </a:spcAft>
-            </a:pPr>
-            <a:r>
-              <a:rPr sz="1500">
-                <a:solidFill>
-                  <a:srgbClr val="22282E"/>
-                </a:solidFill>
-              </a:rPr>
-              <a:t>•  Laboratorio local. El MITM se simula solo entre procesos propios.</a:t>
+              <a:t>•  Diffie-Hellman: protocolo donde cada parte elige un secreto, publica gˣ mod p y ambos calculan gˣʸ. Característica: acuerdan clave sin transmitirla.</a:t>
+            </a:r>
+          </a:p>
+          <a:p>
+            <a:pPr>
+              <a:spcAft>
+                <a:spcPts val="600"/>
+              </a:spcAft>
+            </a:pPr>
+            <a:r>
+              <a:rPr sz="1500">
+                <a:solidFill>
+                  <a:srgbClr val="22282E"/>
+                </a:solidFill>
+              </a:rPr>
+              <a:t>•  Problema del logaritmo discreto: dado g, p y gˣ mod p, hallar x es inviable con parámetros grandes.</a:t>
+            </a:r>
+          </a:p>
+          <a:p>
+            <a:pPr>
+              <a:spcAft>
+                <a:spcPts val="600"/>
+              </a:spcAft>
+            </a:pPr>
+            <a:r>
+              <a:rPr sz="1500">
+                <a:solidFill>
+                  <a:srgbClr val="22282E"/>
+                </a:solidFill>
+              </a:rPr>
+              <a:t>•  DHE / ECDHE (efímero): se genera un par nuevo por sesión; aporta forward secrecy.</a:t>
+            </a:r>
+          </a:p>
+          <a:p>
+            <a:pPr>
+              <a:spcAft>
+                <a:spcPts val="600"/>
+              </a:spcAft>
+            </a:pPr>
+            <a:r>
+              <a:rPr sz="1500">
+                <a:solidFill>
+                  <a:srgbClr val="22282E"/>
+                </a:solidFill>
+              </a:rPr>
+              <a:t>•  Forward secrecy: comprometer la clave de largo plazo no descifra sesiones pasadas, porque los efímeros ya se descartaron.</a:t>
+            </a:r>
+          </a:p>
+          <a:p>
+            <a:pPr>
+              <a:spcAft>
+                <a:spcPts val="600"/>
+              </a:spcAft>
+            </a:pPr>
+            <a:r>
+              <a:rPr sz="1500">
+                <a:solidFill>
+                  <a:srgbClr val="22282E"/>
+                </a:solidFill>
+              </a:rPr>
+              <a:t>•  HKDF: función de derivación (extract-then-expand) que convierte el secreto compartido en claves de longitud y propósito adecuados.</a:t>
+            </a:r>
+          </a:p>
+          <a:p>
+            <a:pPr>
+              <a:spcAft>
+                <a:spcPts val="600"/>
+              </a:spcAft>
+            </a:pPr>
+            <a:r>
+              <a:rPr sz="1500">
+                <a:solidFill>
+                  <a:srgbClr val="22282E"/>
+                </a:solidFill>
+              </a:rPr>
+              <a:t>•  MITM: sin autenticación, un atacante intercepta y sustituye las claves públicas, estableciendo dos canales que él controla.</a:t>
+            </a:r>
+          </a:p>
+          <a:p>
+            <a:pPr>
+              <a:spcAft>
+                <a:spcPts val="600"/>
+              </a:spcAft>
+            </a:pPr>
+            <a:r>
+              <a:rPr sz="1500">
+                <a:solidFill>
+                  <a:srgbClr val="22282E"/>
+                </a:solidFill>
+              </a:rPr>
+              <a:t>•  Grupos MODP / Curve25519: parámetros recomendados; evitar primos pequeños o de origen dudoso (Logjam).</a:t>
             </a:r>
           </a:p>
         </p:txBody>
@@ -4375,7 +4766,7 @@
                   <a:srgbClr val="0B3D2E"/>
                 </a:solidFill>
               </a:rPr>
-              <a:t>🧪 Laboratorio guiado</a:t>
+              <a:t>📔 Glosario</a:t>
             </a:r>
           </a:p>
         </p:txBody>
@@ -4413,97 +4804,97 @@
                   <a:srgbClr val="22282E"/>
                 </a:solidFill>
               </a:rPr>
-              <a:t>•  DH de juguete a mano. Con p=23, g=5, Alice elige a=6 y Bob b=15. Calcula A=5⁶ mod 23, B=5¹⁵ mod 23 y verifica que Bᵃ mod 23 = Aᵇ mod 23. Ese es el secreto compartido.</a:t>
-            </a:r>
-          </a:p>
-          <a:p>
-            <a:pPr>
-              <a:spcAft>
-                <a:spcPts val="600"/>
-              </a:spcAft>
-            </a:pPr>
-            <a:r>
-              <a:rPr sz="1500">
-                <a:solidFill>
-                  <a:srgbClr val="22282E"/>
-                </a:solidFill>
-              </a:rPr>
-              <a:t>•  ECDH con X25519 y HKDF en Python:</a:t>
-            </a:r>
-          </a:p>
-          <a:p>
-            <a:pPr>
-              <a:spcAft>
-                <a:spcPts val="600"/>
-              </a:spcAft>
-            </a:pPr>
-            <a:r>
-              <a:rPr sz="1500">
-                <a:solidFill>
-                  <a:srgbClr val="22282E"/>
-                </a:solidFill>
-              </a:rPr>
-              <a:t>•  from cryptography.hazmat.primitives.asymmetric.x25519 import X25519PrivateKey</a:t>
-            </a:r>
-          </a:p>
-          <a:p>
-            <a:pPr>
-              <a:spcAft>
-                <a:spcPts val="600"/>
-              </a:spcAft>
-            </a:pPr>
-            <a:r>
-              <a:rPr sz="1500">
-                <a:solidFill>
-                  <a:srgbClr val="22282E"/>
-                </a:solidFill>
-              </a:rPr>
-              <a:t>•  from cryptography.hazmat.primitives.kdf.hkdf import HKDF</a:t>
-            </a:r>
-          </a:p>
-          <a:p>
-            <a:pPr>
-              <a:spcAft>
-                <a:spcPts val="600"/>
-              </a:spcAft>
-            </a:pPr>
-            <a:r>
-              <a:rPr sz="1500">
-                <a:solidFill>
-                  <a:srgbClr val="22282E"/>
-                </a:solidFill>
-              </a:rPr>
-              <a:t>•  from cryptography.hazmat.primitives import hashes</a:t>
-            </a:r>
-          </a:p>
-          <a:p>
-            <a:pPr>
-              <a:spcAft>
-                <a:spcPts val="600"/>
-              </a:spcAft>
-            </a:pPr>
-            <a:r>
-              <a:rPr sz="1500">
-                <a:solidFill>
-                  <a:srgbClr val="22282E"/>
-                </a:solidFill>
-              </a:rPr>
-              <a:t>•  a = X25519PrivateKey.generate(); b = X25519PrivateKey.generate()</a:t>
-            </a:r>
-          </a:p>
-          <a:p>
-            <a:pPr>
-              <a:spcAft>
-                <a:spcPts val="600"/>
-              </a:spcAft>
-            </a:pPr>
-            <a:r>
-              <a:rPr sz="1500">
-                <a:solidFill>
-                  <a:srgbClr val="22282E"/>
-                </a:solidFill>
-              </a:rPr>
-              <a:t>•  shared = a.exchange(b.publickey())</a:t>
+              <a:t>•  Término — Definición concisa</a:t>
+            </a:r>
+          </a:p>
+          <a:p>
+            <a:pPr>
+              <a:spcAft>
+                <a:spcPts val="600"/>
+              </a:spcAft>
+            </a:pPr>
+            <a:r>
+              <a:rPr sz="1500">
+                <a:solidFill>
+                  <a:srgbClr val="22282E"/>
+                </a:solidFill>
+              </a:rPr>
+              <a:t>•  Diffie-Hellman — Acuerdo de clave secreta mediante mensajes públicos</a:t>
+            </a:r>
+          </a:p>
+          <a:p>
+            <a:pPr>
+              <a:spcAft>
+                <a:spcPts val="600"/>
+              </a:spcAft>
+            </a:pPr>
+            <a:r>
+              <a:rPr sz="1500">
+                <a:solidFill>
+                  <a:srgbClr val="22282E"/>
+                </a:solidFill>
+              </a:rPr>
+              <a:t>•  Logaritmo discreto — Hallar a conocidos g y gᵃ mod p; base de la seguridad</a:t>
+            </a:r>
+          </a:p>
+          <a:p>
+            <a:pPr>
+              <a:spcAft>
+                <a:spcPts val="600"/>
+              </a:spcAft>
+            </a:pPr>
+            <a:r>
+              <a:rPr sz="1500">
+                <a:solidFill>
+                  <a:srgbClr val="22282E"/>
+                </a:solidFill>
+              </a:rPr>
+              <a:t>•  p y g — Primo y generador públicos que definen el grupo</a:t>
+            </a:r>
+          </a:p>
+          <a:p>
+            <a:pPr>
+              <a:spcAft>
+                <a:spcPts val="600"/>
+              </a:spcAft>
+            </a:pPr>
+            <a:r>
+              <a:rPr sz="1500">
+                <a:solidFill>
+                  <a:srgbClr val="22282E"/>
+                </a:solidFill>
+              </a:rPr>
+              <a:t>•  Secreto compartido — gᵃᵇ mod p, al que llegan ambas partes</a:t>
+            </a:r>
+          </a:p>
+          <a:p>
+            <a:pPr>
+              <a:spcAft>
+                <a:spcPts val="600"/>
+              </a:spcAft>
+            </a:pPr>
+            <a:r>
+              <a:rPr sz="1500">
+                <a:solidFill>
+                  <a:srgbClr val="22282E"/>
+                </a:solidFill>
+              </a:rPr>
+              <a:t>•  DH estático — Secreto fijo reutilizado; sin forward secrecy</a:t>
+            </a:r>
+          </a:p>
+          <a:p>
+            <a:pPr>
+              <a:spcAft>
+                <a:spcPts val="600"/>
+              </a:spcAft>
+            </a:pPr>
+            <a:r>
+              <a:rPr sz="1500">
+                <a:solidFill>
+                  <a:srgbClr val="22282E"/>
+                </a:solidFill>
+              </a:rPr>
+              <a:t>•  DHE / ECDHE — Diffie-Hellman efímero: par nuevo por sesión</a:t>
             </a:r>
           </a:p>
         </p:txBody>
@@ -4554,7 +4945,7 @@
                   <a:srgbClr val="0B3D2E"/>
                 </a:solidFill>
               </a:rPr>
-              <a:t>✍️ Ejercicios</a:t>
+              <a:t>🧰 Herramientas y preparación</a:t>
             </a:r>
           </a:p>
         </p:txBody>
@@ -4592,82 +4983,7 @@
                   <a:srgbClr val="22282E"/>
                 </a:solidFill>
               </a:rPr>
-              <a:t>•  Repite el DH de juguete con p=97, g=5 y valores propios.</a:t>
-            </a:r>
-          </a:p>
-          <a:p>
-            <a:pPr>
-              <a:spcAft>
-                <a:spcPts val="600"/>
-              </a:spcAft>
-            </a:pPr>
-            <a:r>
-              <a:rPr sz="1500">
-                <a:solidFill>
-                  <a:srgbClr val="22282E"/>
-                </a:solidFill>
-              </a:rPr>
-              <a:t>•  Explica por qué gˣʸ = gʸˣ permite el acuerdo.</a:t>
-            </a:r>
-          </a:p>
-          <a:p>
-            <a:pPr>
-              <a:spcAft>
-                <a:spcPts val="600"/>
-              </a:spcAft>
-            </a:pPr>
-            <a:r>
-              <a:rPr sz="1500">
-                <a:solidFill>
-                  <a:srgbClr val="22282E"/>
-                </a:solidFill>
-              </a:rPr>
-              <a:t>•  Implementa el MITM y muéstralo funcionando en tu laboratorio.</a:t>
-            </a:r>
-          </a:p>
-          <a:p>
-            <a:pPr>
-              <a:spcAft>
-                <a:spcPts val="600"/>
-              </a:spcAft>
-            </a:pPr>
-            <a:r>
-              <a:rPr sz="1500">
-                <a:solidFill>
-                  <a:srgbClr val="22282E"/>
-                </a:solidFill>
-              </a:rPr>
-              <a:t>•  Investiga el ataque Logjam y qué grupos evitar.</a:t>
-            </a:r>
-          </a:p>
-          <a:p>
-            <a:pPr>
-              <a:spcAft>
-                <a:spcPts val="600"/>
-              </a:spcAft>
-            </a:pPr>
-            <a:r>
-              <a:rPr sz="1500">
-                <a:solidFill>
-                  <a:srgbClr val="22282E"/>
-                </a:solidFill>
-              </a:rPr>
-              <a:t>•  Deriva dos claves (cifrado y MAC) del mismo secreto con HKDF e info distintos.</a:t>
-            </a:r>
-          </a:p>
-          <a:p>
-            <a:pPr>
-              <a:spcAft>
-                <a:spcPts val="600"/>
-              </a:spcAft>
-            </a:pPr>
-            <a:r>
-              <a:rPr sz="1500">
-                <a:solidFill>
-                  <a:srgbClr val="22282E"/>
-                </a:solidFill>
-              </a:rPr>
-              <a:t>•  Compara DHE clásico con ECDHE en rendimiento y tamaño.</a:t>
+              <a:t>•  Laboratorio local. El MITM se simula solo entre procesos propios.</a:t>
             </a:r>
           </a:p>
         </p:txBody>
@@ -4718,7 +5034,7 @@
                   <a:srgbClr val="0B3D2E"/>
                 </a:solidFill>
               </a:rPr>
-              <a:t>📝 Reto verificable</a:t>
+              <a:t>🧪 Laboratorio guiado</a:t>
             </a:r>
           </a:p>
         </p:txBody>
@@ -4756,7 +5072,52 @@
                   <a:srgbClr val="22282E"/>
                 </a:solidFill>
               </a:rPr>
-              <a:t>•  Implementa un handshake ECDHE autenticado: cada parte firma su clave pública efímera con Ed25519 (clave de largo plazo) y verifica la del otro antes de derivar la clave de sesión. Criterio de aceptación: un MITM que altere las claves efímeras es detectado porque la firma no valida, y el canal solo se establece entre las partes legítimas.</a:t>
+              <a:t>•  DH de juguete a mano. Con p=23, g=5, Alice elige a=6 y Bob b=15. Calcula A=5⁶ mod 23, B=5¹⁵ mod 23 y verifica que Bᵃ mod 23 = Aᵇ mod 23. Ese es el secreto compartido.</a:t>
+            </a:r>
+          </a:p>
+          <a:p>
+            <a:pPr>
+              <a:spcAft>
+                <a:spcPts val="600"/>
+              </a:spcAft>
+            </a:pPr>
+            <a:r>
+              <a:rPr sz="1500">
+                <a:solidFill>
+                  <a:srgbClr val="22282E"/>
+                </a:solidFill>
+              </a:rPr>
+              <a:t>•  ECDH con X25519 y HKDF en Python:</a:t>
+            </a:r>
+          </a:p>
+          <a:p>
+            <a:pPr>
+              <a:spcAft>
+                <a:spcPts val="600"/>
+              </a:spcAft>
+            </a:pPr>
+            <a:r>
+              <a:rPr sz="1500">
+                <a:solidFill>
+                  <a:srgbClr val="22282E"/>
+                </a:solidFill>
+              </a:rPr>
+              <a:t>•  Simula un MITM. Coloca un "atacante" entre A y B que reemplaza cada clave pública por la suya. Comprueba que A y B acaban con claves distintas que el atacante conoce → demuestra la necesidad de…</a:t>
+            </a:r>
+          </a:p>
+          <a:p>
+            <a:pPr>
+              <a:spcAft>
+                <a:spcPts val="600"/>
+              </a:spcAft>
+            </a:pPr>
+            <a:r>
+              <a:rPr sz="1500">
+                <a:solidFill>
+                  <a:srgbClr val="22282E"/>
+                </a:solidFill>
+              </a:rPr>
+              <a:t>•  Forward secrecy. Genera efímeros por sesión y razona por qué revelar la clave estática no compromete sesiones antiguas.</a:t>
             </a:r>
           </a:p>
         </p:txBody>
